--- a/Only A Holy God-C.pptx
+++ b/Only A Holy God-C.pptx
@@ -3906,8 +3906,70 @@
                 <a:latin typeface="Avenir Medium" panose="02000503020000020003" pitchFamily="2" charset="0"/>
                 <a:ea typeface="Bodoni Ornaments" pitchFamily="2" charset="0"/>
               </a:rPr>
-              <a:t>Am / C / F / C </a:t>
-            </a:r>
+              <a:t>Am / C / F / C  </a:t>
+            </a:r>
+            <a:r>
+              <a:rPr lang="en-US" sz="3600" dirty="0">
+                <a:solidFill>
+                  <a:schemeClr val="accent1">
+                    <a:lumMod val="20000"/>
+                    <a:lumOff val="80000"/>
+                  </a:schemeClr>
+                </a:solidFill>
+                <a:latin typeface="Avenir Medium" panose="02000503020000020003" pitchFamily="2" charset="0"/>
+                <a:ea typeface="Bodoni Ornaments" pitchFamily="2" charset="0"/>
+              </a:rPr>
+              <a:t>CAPO 2</a:t>
+            </a:r>
+            <a:r>
+              <a:rPr lang="en-US" sz="3600" baseline="30000" dirty="0">
+                <a:solidFill>
+                  <a:schemeClr val="accent1">
+                    <a:lumMod val="20000"/>
+                    <a:lumOff val="80000"/>
+                  </a:schemeClr>
+                </a:solidFill>
+                <a:latin typeface="Avenir Medium" panose="02000503020000020003" pitchFamily="2" charset="0"/>
+                <a:ea typeface="Bodoni Ornaments" pitchFamily="2" charset="0"/>
+              </a:rPr>
+              <a:t>nd</a:t>
+            </a:r>
+            <a:r>
+              <a:rPr lang="en-US" sz="3600" dirty="0">
+                <a:solidFill>
+                  <a:schemeClr val="accent1">
+                    <a:lumMod val="20000"/>
+                    <a:lumOff val="80000"/>
+                  </a:schemeClr>
+                </a:solidFill>
+                <a:latin typeface="Avenir Medium" panose="02000503020000020003" pitchFamily="2" charset="0"/>
+                <a:ea typeface="Bodoni Ornaments" pitchFamily="2" charset="0"/>
+              </a:rPr>
+              <a:t> for Marina</a:t>
+            </a:r>
+            <a:r>
+              <a:rPr lang="en-US" sz="3600">
+                <a:solidFill>
+                  <a:schemeClr val="accent1">
+                    <a:lumMod val="20000"/>
+                    <a:lumOff val="80000"/>
+                  </a:schemeClr>
+                </a:solidFill>
+                <a:latin typeface="Avenir Medium" panose="02000503020000020003" pitchFamily="2" charset="0"/>
+                <a:ea typeface="Bodoni Ornaments" pitchFamily="2" charset="0"/>
+              </a:rPr>
+              <a:t>, Skyler</a:t>
+            </a:r>
+            <a:endParaRPr lang="en-US" sz="3600" dirty="0">
+              <a:solidFill>
+                <a:schemeClr val="accent1">
+                  <a:lumMod val="20000"/>
+                  <a:lumOff val="80000"/>
+                </a:schemeClr>
+              </a:solidFill>
+              <a:latin typeface="Avenir Medium" panose="02000503020000020003" pitchFamily="2" charset="0"/>
+              <a:ea typeface="Bodoni Ornaments" pitchFamily="2" charset="0"/>
+            </a:endParaRPr>
           </a:p>
           <a:p>
             <a:pPr algn="l"/>
